--- a/slides/presentation.pptx
+++ b/slides/presentation.pptx
@@ -4159,7 +4159,7 @@
                 </a:solidFill>
                 <a:latin typeface="Calibri"/>
               </a:rPr>
-              <a:t>~45</a:t>
+              <a:t>104.2</a:t>
             </a:r>
           </a:p>
         </p:txBody>
@@ -4319,7 +4319,7 @@
                 </a:solidFill>
                 <a:latin typeface="Calibri"/>
               </a:rPr>
-              <a:t>~38</a:t>
+              <a:t>101.9</a:t>
             </a:r>
           </a:p>
         </p:txBody>
@@ -4479,7 +4479,7 @@
                 </a:solidFill>
                 <a:latin typeface="Calibri"/>
               </a:rPr>
-              <a:t>TBD</a:t>
+              <a:t>4.2%</a:t>
             </a:r>
           </a:p>
         </p:txBody>
@@ -4559,7 +4559,7 @@
                 </a:solidFill>
                 <a:latin typeface="Calibri"/>
               </a:rPr>
-              <a:t>TBD</a:t>
+              <a:t>101.0</a:t>
             </a:r>
           </a:p>
         </p:txBody>
@@ -4639,7 +4639,7 @@
                 </a:solidFill>
                 <a:latin typeface="Calibri"/>
               </a:rPr>
-              <a:t>TBD</a:t>
+              <a:t>0.0019</a:t>
             </a:r>
           </a:p>
         </p:txBody>
@@ -4719,7 +4719,7 @@
                 </a:solidFill>
                 <a:latin typeface="Calibri"/>
               </a:rPr>
-              <a:t>TBD</a:t>
+              <a:t>103.4</a:t>
             </a:r>
           </a:p>
         </p:txBody>
@@ -4959,7 +4959,7 @@
                 </a:solidFill>
                 <a:latin typeface="Calibri"/>
               </a:rPr>
-              <a:t>~42</a:t>
+              <a:t>30.1</a:t>
             </a:r>
           </a:p>
         </p:txBody>
@@ -5119,7 +5119,7 @@
                 </a:solidFill>
                 <a:latin typeface="Calibri"/>
               </a:rPr>
-              <a:t>~35</a:t>
+              <a:t>49.7</a:t>
             </a:r>
           </a:p>
         </p:txBody>
@@ -5359,7 +5359,7 @@
                 </a:solidFill>
                 <a:latin typeface="Calibri"/>
               </a:rPr>
-              <a:t>TBD</a:t>
+              <a:t>~40</a:t>
             </a:r>
           </a:p>
         </p:txBody>
@@ -5439,7 +5439,7 @@
                 </a:solidFill>
                 <a:latin typeface="Calibri"/>
               </a:rPr>
-              <a:t>TBD</a:t>
+              <a:t>0.1000</a:t>
             </a:r>
           </a:p>
         </p:txBody>
@@ -5519,7 +5519,7 @@
                 </a:solidFill>
                 <a:latin typeface="Calibri"/>
               </a:rPr>
-              <a:t>TBD</a:t>
+              <a:t>~79</a:t>
             </a:r>
           </a:p>
         </p:txBody>
@@ -5679,7 +5679,7 @@
                 </a:solidFill>
                 <a:latin typeface="Calibri"/>
               </a:rPr>
-              <a:t>TBD</a:t>
+              <a:t>3.0%</a:t>
             </a:r>
           </a:p>
         </p:txBody>
@@ -5759,7 +5759,7 @@
                 </a:solidFill>
                 <a:latin typeface="Calibri"/>
               </a:rPr>
-              <a:t>TBD</a:t>
+              <a:t>40.4</a:t>
             </a:r>
           </a:p>
         </p:txBody>
@@ -5839,7 +5839,7 @@
                 </a:solidFill>
                 <a:latin typeface="Calibri"/>
               </a:rPr>
-              <a:t>TBD</a:t>
+              <a:t>0.0051</a:t>
             </a:r>
           </a:p>
         </p:txBody>
@@ -5919,7 +5919,7 @@
                 </a:solidFill>
                 <a:latin typeface="Calibri"/>
               </a:rPr>
-              <a:t>TBD</a:t>
+              <a:t>78.8</a:t>
             </a:r>
           </a:p>
         </p:txBody>
@@ -5954,7 +5954,7 @@
                 </a:solidFill>
                 <a:latin typeface="Calibri"/>
               </a:rPr>
-              <a:t>* Full InfoNCE+UL and Instruct results updating — evaluation in progress</a:t>
+              <a:t>* Triplet model (0.0% ToxiGen) likely collapsed — avg response length 40 words vs base 104 → over-refusal</a:t>
             </a:r>
           </a:p>
         </p:txBody>
@@ -5985,11 +5985,11 @@
             <a:r>
               <a:rPr sz="1300" b="1" i="0">
                 <a:solidFill>
-                  <a:srgbClr val="E03131"/>
-                </a:solidFill>
-                <a:latin typeface="Calibri"/>
-              </a:rPr>
-              <a:t>LooksMaxGPT +9.2pp ToxiGen vs Base confirms anti-expert training works as intended</a:t>
+                  <a:srgbClr val="2F9E44"/>
+                </a:solidFill>
+                <a:latin typeface="Calibri"/>
+              </a:rPr>
+              <a:t>InfoNCE+UL: ToxiGen 9.0% → 3.0%  ·  RTP 0.0061 → 0.0051  ·  LooksMaxGPT +9.2pp confirms anti-expert</a:t>
             </a:r>
           </a:p>
         </p:txBody>
@@ -6201,7 +6201,7 @@
                 </a:solidFill>
                 <a:latin typeface="Calibri"/>
               </a:rPr>
-              <a:t>  • Anti-expert successfully amplifies toxic behavior</a:t>
+              <a:t>  • Avg response length: 30 words (vs base 104) — short/aggressive toxic outputs ✓</a:t>
             </a:r>
           </a:p>
           <a:p>
@@ -6225,7 +6225,7 @@
                 </a:solidFill>
                 <a:latin typeface="Calibri"/>
               </a:rPr>
-              <a:t>Target (triplet) ToxiGen = 0.0% — two interpretations:</a:t>
+              <a:t>Target (InfoNCE+UL): IMPROVEMENT on both metrics</a:t>
             </a:r>
           </a:p>
           <a:p>
@@ -6237,7 +6237,7 @@
                 </a:solidFill>
                 <a:latin typeface="Calibri"/>
               </a:rPr>
-              <a:t>  • Model collapse: generating very short/safe outputs — need to check avg length</a:t>
+              <a:t>  • ToxiGen Rate: 9.0% → 3.0%  (−67%)  ✓</a:t>
             </a:r>
           </a:p>
           <a:p>
@@ -6249,7 +6249,7 @@
                 </a:solidFill>
                 <a:latin typeface="Calibri"/>
               </a:rPr>
-              <a:t>  • Genuine improvement in handling explicit hate prompts</a:t>
+              <a:t>  • RTP Score: 0.0061 → 0.0051  (−16%)  ✓</a:t>
             </a:r>
           </a:p>
           <a:p>
@@ -6261,7 +6261,7 @@
                 </a:solidFill>
                 <a:latin typeface="Calibri"/>
               </a:rPr>
-              <a:t>  → Loss was 0.0049 (collapsed), so model was effectively just doing LM on positives</a:t>
+              <a:t>  • Response length maintained: 40 words — shorter but still substantive</a:t>
             </a:r>
           </a:p>
           <a:p>
@@ -6285,7 +6285,7 @@
                 </a:solidFill>
                 <a:latin typeface="Calibri"/>
               </a:rPr>
-              <a:t>InfoNCE+UL improvements over triplet:</a:t>
+              <a:t>Target (triplet) ToxiGen = 0.0% — likely model collapse</a:t>
             </a:r>
           </a:p>
           <a:p>
@@ -6297,7 +6297,7 @@
                 </a:solidFill>
                 <a:latin typeface="Calibri"/>
               </a:rPr>
-              <a:t>  • Non-trivial gradient signal at every step (loss 0.8812 → 0.2448)</a:t>
+              <a:t>  • Avg response length: ~40 words vs base 104 → over-refusal / output suppression</a:t>
             </a:r>
           </a:p>
           <a:p>
@@ -6309,7 +6309,7 @@
                 </a:solidFill>
                 <a:latin typeface="Calibri"/>
               </a:rPr>
-              <a:t>  • Last-token pooling captures full causal context</a:t>
+              <a:t>  • Loss collapsed to 0.0049 — model learned to minimize output, not repel toxicity</a:t>
             </a:r>
           </a:p>
           <a:p>
@@ -6321,7 +6321,7 @@
                 </a:solidFill>
                 <a:latin typeface="Calibri"/>
               </a:rPr>
-              <a:t>  • Unlikelihood loss directly penalizes toxic token probabilities</a:t>
+              <a:t>  • RTP = 0.1000, worse than base — confirms collapse, not genuine detoxification</a:t>
             </a:r>
           </a:p>
           <a:p>
@@ -6345,7 +6345,7 @@
                 </a:solidFill>
                 <a:latin typeface="Calibri"/>
               </a:rPr>
-              <a:t>Domain mismatch challenge:</a:t>
+              <a:t>Key insight: InfoNCE provides dense gradient signal throughout training,</a:t>
             </a:r>
           </a:p>
           <a:p>
@@ -6357,31 +6357,7 @@
                 </a:solidFill>
                 <a:latin typeface="Calibri"/>
               </a:rPr>
-              <a:t>  • D2 training data is counseling/Q&amp;A (safe, helpful responses)</a:t>
-            </a:r>
-          </a:p>
-          <a:p>
-            <a:pPr algn="l"/>
-            <a:r>
-              <a:rPr sz="1300" b="0">
-                <a:solidFill>
-                  <a:srgbClr val="1E1E1E"/>
-                </a:solidFill>
-                <a:latin typeface="Calibri"/>
-              </a:rPr>
-              <a:t>  • RTP is open-ended sentence continuations (very different distribution)</a:t>
-            </a:r>
-          </a:p>
-          <a:p>
-            <a:pPr algn="l"/>
-            <a:r>
-              <a:rPr sz="1300" b="0">
-                <a:solidFill>
-                  <a:srgbClr val="1E1E1E"/>
-                </a:solidFill>
-                <a:latin typeface="Calibri"/>
-              </a:rPr>
-              <a:t>  • Model tuned on counseling domain may not generalize to arbitrary continuations</a:t>
+              <a:t>  preventing the loss collapse that cripples triplet-trained models.</a:t>
             </a:r>
           </a:p>
         </p:txBody>
@@ -7690,7 +7666,7 @@
                 </a:solidFill>
                 <a:latin typeface="Calibri"/>
               </a:rPr>
-              <a:t>   SFT on 14K toxic samples</a:t>
+              <a:t>   +9.2pp ToxiGen, 25× RTP vs base</a:t>
             </a:r>
           </a:p>
           <a:p>
@@ -7702,7 +7678,7 @@
                 </a:solidFill>
                 <a:latin typeface="Calibri"/>
               </a:rPr>
-              <a:t>   +9.2pp ToxiGen rate vs base</a:t>
+              <a:t>   Confirms hard negative quality</a:t>
             </a:r>
           </a:p>
           <a:p>
@@ -7726,7 +7702,7 @@
                 </a:solidFill>
                 <a:latin typeface="Calibri"/>
               </a:rPr>
-              <a:t>✅ InfoNCE + Unlikelihood + LM loss</a:t>
+              <a:t>✅ Target (InfoNCE+UL)</a:t>
             </a:r>
           </a:p>
           <a:p>
@@ -7738,7 +7714,7 @@
                 </a:solidFill>
                 <a:latin typeface="Calibri"/>
               </a:rPr>
-              <a:t>   Non-trivial gradient signal</a:t>
+              <a:t>   ToxiGen: 9.0% → 3.0% (−67%)</a:t>
             </a:r>
           </a:p>
           <a:p>
@@ -7750,7 +7726,7 @@
                 </a:solidFill>
                 <a:latin typeface="Calibri"/>
               </a:rPr>
-              <a:t>   Last-token pooling</a:t>
+              <a:t>   RTP: 0.0061 → 0.0051 (−16%)</a:t>
             </a:r>
           </a:p>
           <a:p>
@@ -7762,7 +7738,7 @@
                 </a:solidFill>
                 <a:latin typeface="Calibri"/>
               </a:rPr>
-              <a:t>   Proper padding mask</a:t>
+              <a:t>   Beats base on both metrics</a:t>
             </a:r>
           </a:p>
           <a:p>
@@ -7786,6 +7762,54 @@
                 </a:solidFill>
                 <a:latin typeface="Calibri"/>
               </a:rPr>
+              <a:t>✅ InfoNCE &gt; Triplet (empirically)</a:t>
+            </a:r>
+          </a:p>
+          <a:p>
+            <a:pPr algn="l"/>
+            <a:r>
+              <a:rPr sz="1200" b="0">
+                <a:solidFill>
+                  <a:srgbClr val="1E1E1E"/>
+                </a:solidFill>
+                <a:latin typeface="Calibri"/>
+              </a:rPr>
+              <a:t>   Triplet collapsed, InfoNCE learned</a:t>
+            </a:r>
+          </a:p>
+          <a:p>
+            <a:pPr algn="l"/>
+            <a:r>
+              <a:rPr sz="1200" b="0">
+                <a:solidFill>
+                  <a:srgbClr val="1E1E1E"/>
+                </a:solidFill>
+                <a:latin typeface="Calibri"/>
+              </a:rPr>
+              <a:t>   Loss 0.8812 → 0.2448 over 3 epochs</a:t>
+            </a:r>
+          </a:p>
+          <a:p>
+            <a:pPr algn="l"/>
+            <a:r>
+              <a:rPr sz="1200" b="0">
+                <a:solidFill>
+                  <a:srgbClr val="1E1E1E"/>
+                </a:solidFill>
+                <a:latin typeface="Calibri"/>
+              </a:rPr>
+              <a:t/>
+            </a:r>
+          </a:p>
+          <a:p>
+            <a:pPr algn="l"/>
+            <a:r>
+              <a:rPr sz="1200" b="0">
+                <a:solidFill>
+                  <a:srgbClr val="1E1E1E"/>
+                </a:solidFill>
+                <a:latin typeface="Calibri"/>
+              </a:rPr>
               <a:t>✅ Full evaluation pipeline</a:t>
             </a:r>
           </a:p>
@@ -7798,7 +7822,7 @@
                 </a:solidFill>
                 <a:latin typeface="Calibri"/>
               </a:rPr>
-              <a:t>   ToxiGen + RTP benchmarks</a:t>
+              <a:t>   ToxiGen + RTP + length tracking</a:t>
             </a:r>
           </a:p>
           <a:p>
@@ -7810,7 +7834,7 @@
                 </a:solidFill>
                 <a:latin typeface="Calibri"/>
               </a:rPr>
-              <a:t>   toxic-bert scorer (local)</a:t>
+              <a:t/>
             </a:r>
           </a:p>
           <a:p>
@@ -7822,7 +7846,7 @@
                 </a:solidFill>
                 <a:latin typeface="Calibri"/>
               </a:rPr>
-              <a:t>   Response length tracking</a:t>
+              <a:t>All on single GPU  ·  LoRA only</a:t>
             </a:r>
           </a:p>
           <a:p>
@@ -7834,67 +7858,7 @@
                 </a:solidFill>
                 <a:latin typeface="Calibri"/>
               </a:rPr>
-              <a:t/>
-            </a:r>
-          </a:p>
-          <a:p>
-            <a:pPr algn="l"/>
-            <a:r>
-              <a:rPr sz="1200" b="0">
-                <a:solidFill>
-                  <a:srgbClr val="1E1E1E"/>
-                </a:solidFill>
-                <a:latin typeface="Calibri"/>
-              </a:rPr>
-              <a:t>✅ DPO training script ready</a:t>
-            </a:r>
-          </a:p>
-          <a:p>
-            <a:pPr algn="l"/>
-            <a:r>
-              <a:rPr sz="1200" b="0">
-                <a:solidFill>
-                  <a:srgbClr val="1E1E1E"/>
-                </a:solidFill>
-                <a:latin typeface="Calibri"/>
-              </a:rPr>
-              <a:t>   For immediate future use</a:t>
-            </a:r>
-          </a:p>
-          <a:p>
-            <a:pPr algn="l"/>
-            <a:r>
-              <a:rPr sz="1200" b="0">
-                <a:solidFill>
-                  <a:srgbClr val="1E1E1E"/>
-                </a:solidFill>
-                <a:latin typeface="Calibri"/>
-              </a:rPr>
-              <a:t/>
-            </a:r>
-          </a:p>
-          <a:p>
-            <a:pPr algn="l"/>
-            <a:r>
-              <a:rPr sz="1200" b="0">
-                <a:solidFill>
-                  <a:srgbClr val="1E1E1E"/>
-                </a:solidFill>
-                <a:latin typeface="Calibri"/>
-              </a:rPr>
-              <a:t>All on single GPU  ·  LoRA only</a:t>
-            </a:r>
-          </a:p>
-          <a:p>
-            <a:pPr algn="l"/>
-            <a:r>
-              <a:rPr sz="1200" b="0">
-                <a:solidFill>
-                  <a:srgbClr val="1E1E1E"/>
-                </a:solidFill>
-                <a:latin typeface="Calibri"/>
-              </a:rPr>
-              <a:t>~30 min per model</a:t>
+              <a:t>0.22% params  ·  ~30 min/model</a:t>
             </a:r>
           </a:p>
         </p:txBody>

--- a/slides/presentation.pptx
+++ b/slides/presentation.pptx
@@ -5279,7 +5279,7 @@
                 </a:solidFill>
                 <a:latin typeface="Calibri"/>
               </a:rPr>
-              <a:t>0.0%</a:t>
+              <a:t>0.0%*</a:t>
             </a:r>
           </a:p>
         </p:txBody>
@@ -5359,7 +5359,7 @@
                 </a:solidFill>
                 <a:latin typeface="Calibri"/>
               </a:rPr>
-              <a:t>~40</a:t>
+              <a:t>—</a:t>
             </a:r>
           </a:p>
         </p:txBody>
@@ -5439,7 +5439,7 @@
                 </a:solidFill>
                 <a:latin typeface="Calibri"/>
               </a:rPr>
-              <a:t>0.1000</a:t>
+              <a:t>0.1000*</a:t>
             </a:r>
           </a:p>
         </p:txBody>
@@ -5519,7 +5519,7 @@
                 </a:solidFill>
                 <a:latin typeface="Calibri"/>
               </a:rPr>
-              <a:t>~79</a:t>
+              <a:t>—</a:t>
             </a:r>
           </a:p>
         </p:txBody>
@@ -5954,7 +5954,7 @@
                 </a:solidFill>
                 <a:latin typeface="Calibri"/>
               </a:rPr>
-              <a:t>* Triplet model (0.0% ToxiGen) likely collapsed — avg response length 40 words vs base 104 → over-refusal</a:t>
+              <a:t>* Triplet model: loss collapsed to 0.0049 by epoch 2; 0.0% ToxiGen likely over-refusal not genuine detox; RTP 0.1000 worse than base</a:t>
             </a:r>
           </a:p>
         </p:txBody>
